--- a/assets/powerpoints/module-n1-classe/E1-je-me-lance.pptx
+++ b/assets/powerpoints/module-n1-classe/E1-je-me-lance.pptx
@@ -6014,7 +6014,97 @@
                 </a:solidFill>
                 <a:latin typeface="Verdana"/>
               </a:rPr>
-              <a:t>Dans l'activité : &lt;b&gt;la consigne&lt;/b&gt; (l'enseignante dit deux mots, vous faites), &lt;b&gt;l'objet&lt;/b&gt; (on vous montre une chose, vous la nommez), &lt;b&gt;l'heure&lt;/b&gt; (vous demandez à quelle heure). Vous choisissez d'être l'&lt;b&gt;élève&lt;/b&gt; ou l'&lt;b&gt;enseignante&lt;/b&gt;.</a:t>
+              <a:t>Dans l'activité : </a:t>
+            </a:r>
+            <a:r>
+              <a:rPr sz="2000" b="1" i="0">
+                <a:solidFill>
+                  <a:srgbClr val="4B4F52"/>
+                </a:solidFill>
+                <a:latin typeface="Verdana"/>
+              </a:rPr>
+              <a:t>la consigne</a:t>
+            </a:r>
+            <a:r>
+              <a:rPr sz="2000" b="0" i="0">
+                <a:solidFill>
+                  <a:srgbClr val="4B4F52"/>
+                </a:solidFill>
+                <a:latin typeface="Verdana"/>
+              </a:rPr>
+              <a:t> (l'enseignante dit deux mots, vous faites), </a:t>
+            </a:r>
+            <a:r>
+              <a:rPr sz="2000" b="1" i="0">
+                <a:solidFill>
+                  <a:srgbClr val="4B4F52"/>
+                </a:solidFill>
+                <a:latin typeface="Verdana"/>
+              </a:rPr>
+              <a:t>l'objet</a:t>
+            </a:r>
+            <a:r>
+              <a:rPr sz="2000" b="0" i="0">
+                <a:solidFill>
+                  <a:srgbClr val="4B4F52"/>
+                </a:solidFill>
+                <a:latin typeface="Verdana"/>
+              </a:rPr>
+              <a:t> (on vous montre une chose, vous la nommez), </a:t>
+            </a:r>
+            <a:r>
+              <a:rPr sz="2000" b="1" i="0">
+                <a:solidFill>
+                  <a:srgbClr val="4B4F52"/>
+                </a:solidFill>
+                <a:latin typeface="Verdana"/>
+              </a:rPr>
+              <a:t>l'heure</a:t>
+            </a:r>
+            <a:r>
+              <a:rPr sz="2000" b="0" i="0">
+                <a:solidFill>
+                  <a:srgbClr val="4B4F52"/>
+                </a:solidFill>
+                <a:latin typeface="Verdana"/>
+              </a:rPr>
+              <a:t> (vous demandez à quelle heure). Vous choisissez d'être l'</a:t>
+            </a:r>
+            <a:r>
+              <a:rPr sz="2000" b="1" i="0">
+                <a:solidFill>
+                  <a:srgbClr val="4B4F52"/>
+                </a:solidFill>
+                <a:latin typeface="Verdana"/>
+              </a:rPr>
+              <a:t>élève</a:t>
+            </a:r>
+            <a:r>
+              <a:rPr sz="2000" b="0" i="0">
+                <a:solidFill>
+                  <a:srgbClr val="4B4F52"/>
+                </a:solidFill>
+                <a:latin typeface="Verdana"/>
+              </a:rPr>
+              <a:t> ou l'</a:t>
+            </a:r>
+            <a:r>
+              <a:rPr sz="2000" b="1" i="0">
+                <a:solidFill>
+                  <a:srgbClr val="4B4F52"/>
+                </a:solidFill>
+                <a:latin typeface="Verdana"/>
+              </a:rPr>
+              <a:t>enseignante</a:t>
+            </a:r>
+            <a:r>
+              <a:rPr sz="2000" b="0" i="0">
+                <a:solidFill>
+                  <a:srgbClr val="4B4F52"/>
+                </a:solidFill>
+                <a:latin typeface="Verdana"/>
+              </a:rPr>
+              <a:t>.</a:t>
             </a:r>
           </a:p>
         </p:txBody>
@@ -8417,7 +8507,25 @@
                 </a:solidFill>
                 <a:latin typeface="Verdana"/>
               </a:rPr>
-              <a:t>Vous ne vous appelez pas Bopha et votre horaire n'est pas le sien. Ce sont les &lt;b&gt;phrases utiles&lt;/b&gt; qui se réemploient — « c'est un… », « il est sous… », « à huit heures » — pas le dialogue entier.</a:t>
+              <a:t>Vous ne vous appelez pas Bopha et votre horaire n'est pas le sien. Ce sont les </a:t>
+            </a:r>
+            <a:r>
+              <a:rPr sz="2000" b="1" i="0">
+                <a:solidFill>
+                  <a:srgbClr val="4B4F52"/>
+                </a:solidFill>
+                <a:latin typeface="Verdana"/>
+              </a:rPr>
+              <a:t>phrases utiles</a:t>
+            </a:r>
+            <a:r>
+              <a:rPr sz="2000" b="0" i="0">
+                <a:solidFill>
+                  <a:srgbClr val="4B4F52"/>
+                </a:solidFill>
+                <a:latin typeface="Verdana"/>
+              </a:rPr>
+              <a:t> qui se réemploient — « c'est un… », « il est sous… », « à huit heures » — pas le dialogue entier.</a:t>
             </a:r>
           </a:p>
         </p:txBody>
